--- a/paper/fig2_assets/fig2_skeleton.pptx
+++ b/paper/fig2_assets/fig2_skeleton.pptx
@@ -983,9 +983,8 @@
         </p:nvPicPr>
         <p:blipFill>
           <a:blip r:embed="rId1"/>
-          <a:stretch>
-            <a:fillRect/>
-          </a:stretch>
+          <a:srcRect l="0" r="0" t="0" b="0"/>
+          <a:stretch/>
         </p:blipFill>
         <p:spPr>
           <a:xfrm>
@@ -1075,9 +1074,8 @@
         </p:nvPicPr>
         <p:blipFill>
           <a:blip r:embed="rId2"/>
-          <a:stretch>
-            <a:fillRect/>
-          </a:stretch>
+          <a:srcRect l="0" r="0" t="0" b="0"/>
+          <a:stretch/>
         </p:blipFill>
         <p:spPr>
           <a:xfrm>
@@ -1167,9 +1165,8 @@
         </p:nvPicPr>
         <p:blipFill>
           <a:blip r:embed="rId3"/>
-          <a:stretch>
-            <a:fillRect/>
-          </a:stretch>
+          <a:srcRect l="0" r="0" t="0" b="0"/>
+          <a:stretch/>
         </p:blipFill>
         <p:spPr>
           <a:xfrm>
@@ -1259,9 +1256,8 @@
         </p:nvPicPr>
         <p:blipFill>
           <a:blip r:embed="rId4"/>
-          <a:stretch>
-            <a:fillRect/>
-          </a:stretch>
+          <a:srcRect l="0" r="0" t="0" b="0"/>
+          <a:stretch/>
         </p:blipFill>
         <p:spPr>
           <a:xfrm>
@@ -1599,16 +1595,470 @@
           </a:p>
         </p:txBody>
       </p:sp>
-      <p:sp>
-        <p:nvSpPr>
-          <p:cNvPr id="23" name="Text 17"/>
-          <p:cNvSpPr/>
-          <p:nvPr/>
-        </p:nvSpPr>
+      <p:pic>
+        <p:nvPicPr>
+          <p:cNvPr id="23" name="Image 4" descr="E:/3dgs_gaze/paper/fig2_assets/wearer_pnp.jpg">    </p:cNvPr>
+          <p:cNvPicPr>
+            <a:picLocks noChangeAspect="1"/>
+          </p:cNvPicPr>
+          <p:nvPr/>
+        </p:nvPicPr>
+        <p:blipFill>
+          <a:blip r:embed="rId5"/>
+          <a:srcRect l="0" r="0" t="0" b="0"/>
+          <a:stretch/>
+        </p:blipFill>
         <p:spPr>
           <a:xfrm>
             <a:off x="306000" y="1944000"/>
             <a:ext cx="2844000" cy="468000"/>
+          </a:xfrm>
+          <a:prstGeom prst="rect">
+            <a:avLst/>
+          </a:prstGeom>
+        </p:spPr>
+      </p:pic>
+      <p:sp>
+        <p:nvSpPr>
+          <p:cNvPr id="24" name="Shape 17"/>
+          <p:cNvSpPr/>
+          <p:nvPr/>
+        </p:nvSpPr>
+        <p:spPr>
+          <a:xfrm>
+            <a:off x="306000" y="1944000"/>
+            <a:ext cx="2844000" cy="468000"/>
+          </a:xfrm>
+          <a:prstGeom prst="roundRect">
+            <a:avLst>
+              <a:gd name="adj" fmla="val 3908"/>
+            </a:avLst>
+          </a:prstGeom>
+          <a:solidFill>
+            <a:srgbClr val="FFFFFF">
+              <a:alpha val="0"/>
+            </a:srgbClr>
+          </a:solidFill>
+          <a:ln w="9525">
+            <a:solidFill>
+              <a:srgbClr val="9CA3AF"/>
+            </a:solidFill>
+            <a:prstDash val="solid"/>
+          </a:ln>
+        </p:spPr>
+      </p:sp>
+      <p:sp>
+        <p:nvSpPr>
+          <p:cNvPr id="25" name="Shape 18"/>
+          <p:cNvSpPr/>
+          <p:nvPr/>
+        </p:nvSpPr>
+        <p:spPr>
+          <a:xfrm>
+            <a:off x="180000" y="2628000"/>
+            <a:ext cx="3096000" cy="1044000"/>
+          </a:xfrm>
+          <a:prstGeom prst="roundRect">
+            <a:avLst>
+              <a:gd name="adj" fmla="val 5255"/>
+            </a:avLst>
+          </a:prstGeom>
+          <a:solidFill>
+            <a:srgbClr val="FDF0DD"/>
+          </a:solidFill>
+          <a:ln w="19050">
+            <a:solidFill>
+              <a:srgbClr val="D97706"/>
+            </a:solidFill>
+            <a:prstDash val="solid"/>
+          </a:ln>
+        </p:spPr>
+      </p:sp>
+      <p:sp>
+        <p:nvSpPr>
+          <p:cNvPr id="26" name="Text 19"/>
+          <p:cNvSpPr/>
+          <p:nvPr/>
+        </p:nvSpPr>
+        <p:spPr>
+          <a:xfrm>
+            <a:off x="270000" y="2682000"/>
+            <a:ext cx="1332000" cy="936000"/>
+          </a:xfrm>
+          <a:prstGeom prst="rect">
+            <a:avLst/>
+          </a:prstGeom>
+          <a:noFill/>
+          <a:ln/>
+        </p:spPr>
+        <p:txBody>
+          <a:bodyPr wrap="square" lIns="0" tIns="0" rIns="0" bIns="0" rtlCol="0" anchor="ctr"/>
+          <a:lstStyle/>
+          <a:p>
+            <a:pPr algn="l" indent="0" marL="0">
+              <a:buNone/>
+            </a:pPr>
+            <a:r>
+              <a:rPr lang="en-US" sz="1400" b="1" dirty="0">
+                <a:solidFill>
+                  <a:srgbClr val="92400E"/>
+                </a:solidFill>
+                <a:latin typeface="Arial" pitchFamily="34" charset="0"/>
+                <a:ea typeface="Arial" pitchFamily="34" charset="-122"/>
+                <a:cs typeface="Arial" pitchFamily="34" charset="-120"/>
+              </a:rPr>
+              <a:t>World-frame fixation clustering</a:t>
+            </a:r>
+            <a:endParaRPr lang="en-US" sz="1400" dirty="0"/>
+          </a:p>
+          <a:p>
+            <a:pPr algn="l" indent="0" marL="0">
+              <a:buNone/>
+            </a:pPr>
+            <a:r>
+              <a:rPr lang="en-US" sz="1150" dirty="0">
+                <a:solidFill>
+                  <a:srgbClr val="A16207"/>
+                </a:solidFill>
+                <a:latin typeface="Arial" pitchFamily="34" charset="0"/>
+                <a:ea typeface="Arial" pitchFamily="34" charset="-122"/>
+                <a:cs typeface="Arial" pitchFamily="34" charset="-120"/>
+              </a:rPr>
+              <a:t>stable while walking</a:t>
+            </a:r>
+            <a:endParaRPr lang="en-US" sz="1400" dirty="0"/>
+          </a:p>
+        </p:txBody>
+      </p:sp>
+      <p:pic>
+        <p:nvPicPr>
+          <p:cNvPr id="27" name="Image 5" descr="E:/3dgs_gaze/paper/fig2_assets/wearer_cluster.png">    </p:cNvPr>
+          <p:cNvPicPr>
+            <a:picLocks noChangeAspect="1"/>
+          </p:cNvPicPr>
+          <p:nvPr/>
+        </p:nvPicPr>
+        <p:blipFill>
+          <a:blip r:embed="rId6"/>
+          <a:srcRect l="0" r="0" t="0" b="0"/>
+          <a:stretch/>
+        </p:blipFill>
+        <p:spPr>
+          <a:xfrm>
+            <a:off x="1638000" y="2700000"/>
+            <a:ext cx="1404000" cy="900000"/>
+          </a:xfrm>
+          <a:prstGeom prst="rect">
+            <a:avLst/>
+          </a:prstGeom>
+        </p:spPr>
+      </p:pic>
+      <p:sp>
+        <p:nvSpPr>
+          <p:cNvPr id="28" name="Text 20"/>
+          <p:cNvSpPr/>
+          <p:nvPr/>
+        </p:nvSpPr>
+        <p:spPr>
+          <a:xfrm>
+            <a:off x="3564000" y="1422000"/>
+            <a:ext cx="5544000" cy="2250000"/>
+          </a:xfrm>
+          <a:prstGeom prst="roundRect">
+            <a:avLst>
+              <a:gd name="adj" fmla="val 2438"/>
+            </a:avLst>
+          </a:prstGeom>
+          <a:solidFill>
+            <a:srgbClr val="E0F0EE"/>
+          </a:solidFill>
+          <a:ln w="19050">
+            <a:solidFill>
+              <a:srgbClr val="0F766E"/>
+            </a:solidFill>
+          </a:ln>
+        </p:spPr>
+        <p:txBody>
+          <a:bodyPr wrap="square" lIns="76200" tIns="76200" rIns="76200" bIns="76200" rtlCol="0" anchor="t"/>
+          <a:lstStyle/>
+          <a:p>
+            <a:pPr algn="ctr" indent="0" marL="0">
+              <a:buNone/>
+            </a:pPr>
+            <a:r>
+              <a:rPr lang="en-US" sz="1700" b="1" dirty="0">
+                <a:solidFill>
+                  <a:srgbClr val="115E59"/>
+                </a:solidFill>
+                <a:latin typeface="Arial" pitchFamily="34" charset="0"/>
+                <a:ea typeface="Arial" pitchFamily="34" charset="-122"/>
+                <a:cs typeface="Arial" pitchFamily="34" charset="-120"/>
+              </a:rPr>
+              <a:t>Shared 3DGS instance map</a:t>
+            </a:r>
+            <a:endParaRPr lang="en-US" sz="1700" dirty="0"/>
+          </a:p>
+          <a:p>
+            <a:pPr algn="ctr" indent="0" marL="0">
+              <a:buNone/>
+            </a:pPr>
+            <a:r>
+              <a:rPr lang="en-US" sz="1250" dirty="0">
+                <a:solidFill>
+                  <a:srgbClr val="0F766E"/>
+                </a:solidFill>
+                <a:latin typeface="Arial" pitchFamily="34" charset="0"/>
+                <a:ea typeface="Arial" pitchFamily="34" charset="-122"/>
+                <a:cs typeface="Arial" pitchFamily="34" charset="-120"/>
+              </a:rPr>
+              <a:t>one metric frame for human &amp; robot</a:t>
+            </a:r>
+            <a:endParaRPr lang="en-US" sz="1700" dirty="0"/>
+          </a:p>
+        </p:txBody>
+      </p:sp>
+      <p:pic>
+        <p:nvPicPr>
+          <p:cNvPr id="29" name="Image 6" descr="E:/3dgs_gaze/paper/fig2_assets/hub_map.jpg">    </p:cNvPr>
+          <p:cNvPicPr>
+            <a:picLocks noChangeAspect="1"/>
+          </p:cNvPicPr>
+          <p:nvPr/>
+        </p:nvPicPr>
+        <p:blipFill>
+          <a:blip r:embed="rId7"/>
+          <a:srcRect l="0" r="0" t="0" b="0"/>
+          <a:stretch/>
+        </p:blipFill>
+        <p:spPr>
+          <a:xfrm>
+            <a:off x="3780000" y="2034000"/>
+            <a:ext cx="5112000" cy="1530000"/>
+          </a:xfrm>
+          <a:prstGeom prst="rect">
+            <a:avLst/>
+          </a:prstGeom>
+        </p:spPr>
+      </p:pic>
+      <p:sp>
+        <p:nvSpPr>
+          <p:cNvPr id="30" name="Shape 21"/>
+          <p:cNvSpPr/>
+          <p:nvPr/>
+        </p:nvSpPr>
+        <p:spPr>
+          <a:xfrm>
+            <a:off x="3780000" y="2034000"/>
+            <a:ext cx="5112000" cy="1530000"/>
+          </a:xfrm>
+          <a:prstGeom prst="roundRect">
+            <a:avLst>
+              <a:gd name="adj" fmla="val 1195"/>
+            </a:avLst>
+          </a:prstGeom>
+          <a:solidFill>
+            <a:srgbClr val="FFFFFF">
+              <a:alpha val="0"/>
+            </a:srgbClr>
+          </a:solidFill>
+          <a:ln w="9525">
+            <a:solidFill>
+              <a:srgbClr val="9CA3AF"/>
+            </a:solidFill>
+            <a:prstDash val="solid"/>
+          </a:ln>
+        </p:spPr>
+      </p:sp>
+      <p:sp>
+        <p:nvSpPr>
+          <p:cNvPr id="31" name="Text 22"/>
+          <p:cNvSpPr/>
+          <p:nvPr/>
+        </p:nvSpPr>
+        <p:spPr>
+          <a:xfrm>
+            <a:off x="9396000" y="1422000"/>
+            <a:ext cx="3384000" cy="1044000"/>
+          </a:xfrm>
+          <a:prstGeom prst="roundRect">
+            <a:avLst>
+              <a:gd name="adj" fmla="val 5255"/>
+            </a:avLst>
+          </a:prstGeom>
+          <a:solidFill>
+            <a:srgbClr val="E7EEF9"/>
+          </a:solidFill>
+          <a:ln w="19050">
+            <a:solidFill>
+              <a:srgbClr val="1D4ED8"/>
+            </a:solidFill>
+          </a:ln>
+        </p:spPr>
+        <p:txBody>
+          <a:bodyPr wrap="square" lIns="76200" tIns="76200" rIns="76200" bIns="76200" rtlCol="0" anchor="t"/>
+          <a:lstStyle/>
+          <a:p>
+            <a:pPr algn="ctr" indent="0" marL="0">
+              <a:buNone/>
+            </a:pPr>
+            <a:r>
+              <a:rPr lang="en-US" sz="1500" b="1" dirty="0">
+                <a:solidFill>
+                  <a:srgbClr val="1E3A8A"/>
+                </a:solidFill>
+                <a:latin typeface="Arial" pitchFamily="34" charset="0"/>
+                <a:ea typeface="Arial" pitchFamily="34" charset="-122"/>
+                <a:cs typeface="Arial" pitchFamily="34" charset="-120"/>
+              </a:rPr>
+              <a:t>Robot localization &amp; navigation</a:t>
+            </a:r>
+            <a:endParaRPr lang="en-US" sz="1500" dirty="0"/>
+          </a:p>
+          <a:p>
+            <a:pPr algn="ctr" indent="0" marL="0">
+              <a:buNone/>
+            </a:pPr>
+            <a:r>
+              <a:rPr lang="en-US" sz="1200" dirty="0">
+                <a:solidFill>
+                  <a:srgbClr val="1D4ED8"/>
+                </a:solidFill>
+                <a:latin typeface="Arial" pitchFamily="34" charset="0"/>
+                <a:ea typeface="Arial" pitchFamily="34" charset="-122"/>
+                <a:cs typeface="Arial" pitchFamily="34" charset="-120"/>
+              </a:rPr>
+              <a:t>same surveyed tags</a:t>
+            </a:r>
+            <a:endParaRPr lang="en-US" sz="1500" dirty="0"/>
+          </a:p>
+        </p:txBody>
+      </p:sp>
+      <p:pic>
+        <p:nvPicPr>
+          <p:cNvPr id="32" name="Image 7" descr="E:/3dgs_gaze/paper/fig2_assets/robot_nav.jpg">    </p:cNvPr>
+          <p:cNvPicPr>
+            <a:picLocks noChangeAspect="1"/>
+          </p:cNvPicPr>
+          <p:nvPr/>
+        </p:nvPicPr>
+        <p:blipFill>
+          <a:blip r:embed="rId8"/>
+          <a:srcRect l="0" r="0" t="0" b="0"/>
+          <a:stretch/>
+        </p:blipFill>
+        <p:spPr>
+          <a:xfrm>
+            <a:off x="9522000" y="1944000"/>
+            <a:ext cx="3132000" cy="468000"/>
+          </a:xfrm>
+          <a:prstGeom prst="rect">
+            <a:avLst/>
+          </a:prstGeom>
+        </p:spPr>
+      </p:pic>
+      <p:sp>
+        <p:nvSpPr>
+          <p:cNvPr id="33" name="Shape 23"/>
+          <p:cNvSpPr/>
+          <p:nvPr/>
+        </p:nvSpPr>
+        <p:spPr>
+          <a:xfrm>
+            <a:off x="9522000" y="1944000"/>
+            <a:ext cx="3132000" cy="468000"/>
+          </a:xfrm>
+          <a:prstGeom prst="roundRect">
+            <a:avLst>
+              <a:gd name="adj" fmla="val 3908"/>
+            </a:avLst>
+          </a:prstGeom>
+          <a:solidFill>
+            <a:srgbClr val="FFFFFF">
+              <a:alpha val="0"/>
+            </a:srgbClr>
+          </a:solidFill>
+          <a:ln w="9525">
+            <a:solidFill>
+              <a:srgbClr val="9CA3AF"/>
+            </a:solidFill>
+            <a:prstDash val="solid"/>
+          </a:ln>
+        </p:spPr>
+      </p:sp>
+      <p:sp>
+        <p:nvSpPr>
+          <p:cNvPr id="34" name="Text 24"/>
+          <p:cNvSpPr/>
+          <p:nvPr/>
+        </p:nvSpPr>
+        <p:spPr>
+          <a:xfrm>
+            <a:off x="9396000" y="2628000"/>
+            <a:ext cx="3384000" cy="1044000"/>
+          </a:xfrm>
+          <a:prstGeom prst="roundRect">
+            <a:avLst>
+              <a:gd name="adj" fmla="val 5255"/>
+            </a:avLst>
+          </a:prstGeom>
+          <a:solidFill>
+            <a:srgbClr val="E7EEF9"/>
+          </a:solidFill>
+          <a:ln w="19050">
+            <a:solidFill>
+              <a:srgbClr val="1D4ED8"/>
+            </a:solidFill>
+          </a:ln>
+        </p:spPr>
+        <p:txBody>
+          <a:bodyPr wrap="square" lIns="76200" tIns="76200" rIns="76200" bIns="76200" rtlCol="0" anchor="t"/>
+          <a:lstStyle/>
+          <a:p>
+            <a:pPr algn="ctr" indent="0" marL="0">
+              <a:buNone/>
+            </a:pPr>
+            <a:r>
+              <a:rPr lang="en-US" sz="1500" b="1" dirty="0">
+                <a:solidFill>
+                  <a:srgbClr val="1E3A8A"/>
+                </a:solidFill>
+                <a:latin typeface="Arial" pitchFamily="34" charset="0"/>
+                <a:ea typeface="Arial" pitchFamily="34" charset="-122"/>
+                <a:cs typeface="Arial" pitchFamily="34" charset="-120"/>
+              </a:rPr>
+              <a:t>Last-meter disambiguation</a:t>
+            </a:r>
+            <a:endParaRPr lang="en-US" sz="1500" dirty="0"/>
+          </a:p>
+          <a:p>
+            <a:pPr algn="ctr" indent="0" marL="0">
+              <a:buNone/>
+            </a:pPr>
+            <a:r>
+              <a:rPr lang="en-US" sz="1200" dirty="0">
+                <a:solidFill>
+                  <a:srgbClr val="1D4ED8"/>
+                </a:solidFill>
+                <a:latin typeface="Arial" pitchFamily="34" charset="0"/>
+                <a:ea typeface="Arial" pitchFamily="34" charset="-122"/>
+                <a:cs typeface="Arial" pitchFamily="34" charset="-120"/>
+              </a:rPr>
+              <a:t>hint projected into grasp camera</a:t>
+            </a:r>
+            <a:endParaRPr lang="en-US" sz="1500" dirty="0"/>
+          </a:p>
+        </p:txBody>
+      </p:sp>
+      <p:sp>
+        <p:nvSpPr>
+          <p:cNvPr id="35" name="Text 25"/>
+          <p:cNvSpPr/>
+          <p:nvPr/>
+        </p:nvSpPr>
+        <p:spPr>
+          <a:xfrm>
+            <a:off x="9522000" y="3150000"/>
+            <a:ext cx="3132000" cy="468000"/>
           </a:xfrm>
           <a:prstGeom prst="roundRect">
             <a:avLst>
@@ -1641,7 +2091,7 @@
                 <a:ea typeface="Arial" pitchFamily="34" charset="-122"/>
                 <a:cs typeface="Arial" pitchFamily="34" charset="-120"/>
               </a:rPr>
-              <a:t>wearer_pnp.jpg</a:t>
+              <a:t>lastmeter.jpg — projected point inside chosen box</a:t>
             </a:r>
             <a:endParaRPr lang="en-US" sz="1100" dirty="0"/>
           </a:p>
@@ -1649,460 +2099,7 @@
       </p:sp>
       <p:sp>
         <p:nvSpPr>
-          <p:cNvPr id="24" name="Text 18"/>
-          <p:cNvSpPr/>
-          <p:nvPr/>
-        </p:nvSpPr>
-        <p:spPr>
-          <a:xfrm>
-            <a:off x="180000" y="2628000"/>
-            <a:ext cx="3096000" cy="1044000"/>
-          </a:xfrm>
-          <a:prstGeom prst="roundRect">
-            <a:avLst>
-              <a:gd name="adj" fmla="val 5255"/>
-            </a:avLst>
-          </a:prstGeom>
-          <a:solidFill>
-            <a:srgbClr val="FDF0DD"/>
-          </a:solidFill>
-          <a:ln w="19050">
-            <a:solidFill>
-              <a:srgbClr val="D97706"/>
-            </a:solidFill>
-          </a:ln>
-        </p:spPr>
-        <p:txBody>
-          <a:bodyPr wrap="square" lIns="76200" tIns="76200" rIns="76200" bIns="76200" rtlCol="0" anchor="t"/>
-          <a:lstStyle/>
-          <a:p>
-            <a:pPr algn="ctr" indent="0" marL="0">
-              <a:buNone/>
-            </a:pPr>
-            <a:r>
-              <a:rPr lang="en-US" sz="1500" b="1" dirty="0">
-                <a:solidFill>
-                  <a:srgbClr val="92400E"/>
-                </a:solidFill>
-                <a:latin typeface="Arial" pitchFamily="34" charset="0"/>
-                <a:ea typeface="Arial" pitchFamily="34" charset="-122"/>
-                <a:cs typeface="Arial" pitchFamily="34" charset="-120"/>
-              </a:rPr>
-              <a:t>World-frame fixation clustering</a:t>
-            </a:r>
-            <a:endParaRPr lang="en-US" sz="1500" dirty="0"/>
-          </a:p>
-          <a:p>
-            <a:pPr algn="ctr" indent="0" marL="0">
-              <a:buNone/>
-            </a:pPr>
-            <a:r>
-              <a:rPr lang="en-US" sz="1200" dirty="0">
-                <a:solidFill>
-                  <a:srgbClr val="A16207"/>
-                </a:solidFill>
-                <a:latin typeface="Arial" pitchFamily="34" charset="0"/>
-                <a:ea typeface="Arial" pitchFamily="34" charset="-122"/>
-                <a:cs typeface="Arial" pitchFamily="34" charset="-120"/>
-              </a:rPr>
-              <a:t>stable while walking</a:t>
-            </a:r>
-            <a:endParaRPr lang="en-US" sz="1500" dirty="0"/>
-          </a:p>
-        </p:txBody>
-      </p:sp>
-      <p:sp>
-        <p:nvSpPr>
-          <p:cNvPr id="25" name="Text 19"/>
-          <p:cNvSpPr/>
-          <p:nvPr/>
-        </p:nvSpPr>
-        <p:spPr>
-          <a:xfrm>
-            <a:off x="306000" y="3150000"/>
-            <a:ext cx="2844000" cy="468000"/>
-          </a:xfrm>
-          <a:prstGeom prst="roundRect">
-            <a:avLst>
-              <a:gd name="adj" fmla="val 7815"/>
-            </a:avLst>
-          </a:prstGeom>
-          <a:solidFill>
-            <a:srgbClr val="F3F4F6"/>
-          </a:solidFill>
-          <a:ln w="12700">
-            <a:solidFill>
-              <a:srgbClr val="9CA3AF"/>
-            </a:solidFill>
-            <a:prstDash val="dash"/>
-          </a:ln>
-        </p:spPr>
-        <p:txBody>
-          <a:bodyPr wrap="square" lIns="50800" tIns="50800" rIns="50800" bIns="50800" rtlCol="0" anchor="ctr"/>
-          <a:lstStyle/>
-          <a:p>
-            <a:pPr algn="ctr" indent="0" marL="0">
-              <a:buNone/>
-            </a:pPr>
-            <a:r>
-              <a:rPr lang="en-US" sz="1100" i="1" dirty="0">
-                <a:solidFill>
-                  <a:srgbClr val="6B7280"/>
-                </a:solidFill>
-                <a:latin typeface="Arial" pitchFamily="34" charset="0"/>
-                <a:ea typeface="Arial" pitchFamily="34" charset="-122"/>
-                <a:cs typeface="Arial" pitchFamily="34" charset="-120"/>
-              </a:rPr>
-              <a:t>wearer_cluster.png</a:t>
-            </a:r>
-            <a:endParaRPr lang="en-US" sz="1100" dirty="0"/>
-          </a:p>
-        </p:txBody>
-      </p:sp>
-      <p:sp>
-        <p:nvSpPr>
-          <p:cNvPr id="26" name="Text 20"/>
-          <p:cNvSpPr/>
-          <p:nvPr/>
-        </p:nvSpPr>
-        <p:spPr>
-          <a:xfrm>
-            <a:off x="3564000" y="1422000"/>
-            <a:ext cx="5544000" cy="2250000"/>
-          </a:xfrm>
-          <a:prstGeom prst="roundRect">
-            <a:avLst>
-              <a:gd name="adj" fmla="val 2438"/>
-            </a:avLst>
-          </a:prstGeom>
-          <a:solidFill>
-            <a:srgbClr val="E0F0EE"/>
-          </a:solidFill>
-          <a:ln w="19050">
-            <a:solidFill>
-              <a:srgbClr val="0F766E"/>
-            </a:solidFill>
-          </a:ln>
-        </p:spPr>
-        <p:txBody>
-          <a:bodyPr wrap="square" lIns="76200" tIns="76200" rIns="76200" bIns="76200" rtlCol="0" anchor="t"/>
-          <a:lstStyle/>
-          <a:p>
-            <a:pPr algn="ctr" indent="0" marL="0">
-              <a:buNone/>
-            </a:pPr>
-            <a:r>
-              <a:rPr lang="en-US" sz="1700" b="1" dirty="0">
-                <a:solidFill>
-                  <a:srgbClr val="115E59"/>
-                </a:solidFill>
-                <a:latin typeface="Arial" pitchFamily="34" charset="0"/>
-                <a:ea typeface="Arial" pitchFamily="34" charset="-122"/>
-                <a:cs typeface="Arial" pitchFamily="34" charset="-120"/>
-              </a:rPr>
-              <a:t>Shared 3DGS instance map</a:t>
-            </a:r>
-            <a:endParaRPr lang="en-US" sz="1700" dirty="0"/>
-          </a:p>
-          <a:p>
-            <a:pPr algn="ctr" indent="0" marL="0">
-              <a:buNone/>
-            </a:pPr>
-            <a:r>
-              <a:rPr lang="en-US" sz="1250" dirty="0">
-                <a:solidFill>
-                  <a:srgbClr val="0F766E"/>
-                </a:solidFill>
-                <a:latin typeface="Arial" pitchFamily="34" charset="0"/>
-                <a:ea typeface="Arial" pitchFamily="34" charset="-122"/>
-                <a:cs typeface="Arial" pitchFamily="34" charset="-120"/>
-              </a:rPr>
-              <a:t>one metric frame for human &amp; robot</a:t>
-            </a:r>
-            <a:endParaRPr lang="en-US" sz="1700" dirty="0"/>
-          </a:p>
-        </p:txBody>
-      </p:sp>
-      <p:pic>
-        <p:nvPicPr>
-          <p:cNvPr id="27" name="Image 4" descr="E:/3dgs_gaze/paper/fig2_assets/hub_map.jpg">    </p:cNvPr>
-          <p:cNvPicPr>
-            <a:picLocks noChangeAspect="1"/>
-          </p:cNvPicPr>
-          <p:nvPr/>
-        </p:nvPicPr>
-        <p:blipFill>
-          <a:blip r:embed="rId5"/>
-          <a:stretch>
-            <a:fillRect/>
-          </a:stretch>
-        </p:blipFill>
-        <p:spPr>
-          <a:xfrm>
-            <a:off x="3780000" y="2034000"/>
-            <a:ext cx="5112000" cy="1530000"/>
-          </a:xfrm>
-          <a:prstGeom prst="rect">
-            <a:avLst/>
-          </a:prstGeom>
-        </p:spPr>
-      </p:pic>
-      <p:sp>
-        <p:nvSpPr>
-          <p:cNvPr id="28" name="Shape 21"/>
-          <p:cNvSpPr/>
-          <p:nvPr/>
-        </p:nvSpPr>
-        <p:spPr>
-          <a:xfrm>
-            <a:off x="3780000" y="2034000"/>
-            <a:ext cx="5112000" cy="1530000"/>
-          </a:xfrm>
-          <a:prstGeom prst="roundRect">
-            <a:avLst>
-              <a:gd name="adj" fmla="val 1195"/>
-            </a:avLst>
-          </a:prstGeom>
-          <a:solidFill>
-            <a:srgbClr val="FFFFFF">
-              <a:alpha val="0"/>
-            </a:srgbClr>
-          </a:solidFill>
-          <a:ln w="9525">
-            <a:solidFill>
-              <a:srgbClr val="9CA3AF"/>
-            </a:solidFill>
-            <a:prstDash val="solid"/>
-          </a:ln>
-        </p:spPr>
-      </p:sp>
-      <p:sp>
-        <p:nvSpPr>
-          <p:cNvPr id="29" name="Text 22"/>
-          <p:cNvSpPr/>
-          <p:nvPr/>
-        </p:nvSpPr>
-        <p:spPr>
-          <a:xfrm>
-            <a:off x="9396000" y="1422000"/>
-            <a:ext cx="3384000" cy="1044000"/>
-          </a:xfrm>
-          <a:prstGeom prst="roundRect">
-            <a:avLst>
-              <a:gd name="adj" fmla="val 5255"/>
-            </a:avLst>
-          </a:prstGeom>
-          <a:solidFill>
-            <a:srgbClr val="E7EEF9"/>
-          </a:solidFill>
-          <a:ln w="19050">
-            <a:solidFill>
-              <a:srgbClr val="1D4ED8"/>
-            </a:solidFill>
-          </a:ln>
-        </p:spPr>
-        <p:txBody>
-          <a:bodyPr wrap="square" lIns="76200" tIns="76200" rIns="76200" bIns="76200" rtlCol="0" anchor="t"/>
-          <a:lstStyle/>
-          <a:p>
-            <a:pPr algn="ctr" indent="0" marL="0">
-              <a:buNone/>
-            </a:pPr>
-            <a:r>
-              <a:rPr lang="en-US" sz="1500" b="1" dirty="0">
-                <a:solidFill>
-                  <a:srgbClr val="1E3A8A"/>
-                </a:solidFill>
-                <a:latin typeface="Arial" pitchFamily="34" charset="0"/>
-                <a:ea typeface="Arial" pitchFamily="34" charset="-122"/>
-                <a:cs typeface="Arial" pitchFamily="34" charset="-120"/>
-              </a:rPr>
-              <a:t>Robot localization &amp; navigation</a:t>
-            </a:r>
-            <a:endParaRPr lang="en-US" sz="1500" dirty="0"/>
-          </a:p>
-          <a:p>
-            <a:pPr algn="ctr" indent="0" marL="0">
-              <a:buNone/>
-            </a:pPr>
-            <a:r>
-              <a:rPr lang="en-US" sz="1200" dirty="0">
-                <a:solidFill>
-                  <a:srgbClr val="1D4ED8"/>
-                </a:solidFill>
-                <a:latin typeface="Arial" pitchFamily="34" charset="0"/>
-                <a:ea typeface="Arial" pitchFamily="34" charset="-122"/>
-                <a:cs typeface="Arial" pitchFamily="34" charset="-120"/>
-              </a:rPr>
-              <a:t>same surveyed tags</a:t>
-            </a:r>
-            <a:endParaRPr lang="en-US" sz="1500" dirty="0"/>
-          </a:p>
-        </p:txBody>
-      </p:sp>
-      <p:sp>
-        <p:nvSpPr>
-          <p:cNvPr id="30" name="Text 23"/>
-          <p:cNvSpPr/>
-          <p:nvPr/>
-        </p:nvSpPr>
-        <p:spPr>
-          <a:xfrm>
-            <a:off x="9522000" y="1944000"/>
-            <a:ext cx="3132000" cy="468000"/>
-          </a:xfrm>
-          <a:prstGeom prst="roundRect">
-            <a:avLst>
-              <a:gd name="adj" fmla="val 7815"/>
-            </a:avLst>
-          </a:prstGeom>
-          <a:solidFill>
-            <a:srgbClr val="F3F4F6"/>
-          </a:solidFill>
-          <a:ln w="12700">
-            <a:solidFill>
-              <a:srgbClr val="9CA3AF"/>
-            </a:solidFill>
-            <a:prstDash val="dash"/>
-          </a:ln>
-        </p:spPr>
-        <p:txBody>
-          <a:bodyPr wrap="square" lIns="50800" tIns="50800" rIns="50800" bIns="50800" rtlCol="0" anchor="ctr"/>
-          <a:lstStyle/>
-          <a:p>
-            <a:pPr algn="ctr" indent="0" marL="0">
-              <a:buNone/>
-            </a:pPr>
-            <a:r>
-              <a:rPr lang="en-US" sz="1100" i="1" dirty="0">
-                <a:solidFill>
-                  <a:srgbClr val="6B7280"/>
-                </a:solidFill>
-                <a:latin typeface="Arial" pitchFamily="34" charset="0"/>
-                <a:ea typeface="Arial" pitchFamily="34" charset="-122"/>
-                <a:cs typeface="Arial" pitchFamily="34" charset="-120"/>
-              </a:rPr>
-              <a:t>robot_nav.jpg</a:t>
-            </a:r>
-            <a:endParaRPr lang="en-US" sz="1100" dirty="0"/>
-          </a:p>
-        </p:txBody>
-      </p:sp>
-      <p:sp>
-        <p:nvSpPr>
-          <p:cNvPr id="31" name="Text 24"/>
-          <p:cNvSpPr/>
-          <p:nvPr/>
-        </p:nvSpPr>
-        <p:spPr>
-          <a:xfrm>
-            <a:off x="9396000" y="2628000"/>
-            <a:ext cx="3384000" cy="1044000"/>
-          </a:xfrm>
-          <a:prstGeom prst="roundRect">
-            <a:avLst>
-              <a:gd name="adj" fmla="val 5255"/>
-            </a:avLst>
-          </a:prstGeom>
-          <a:solidFill>
-            <a:srgbClr val="E7EEF9"/>
-          </a:solidFill>
-          <a:ln w="19050">
-            <a:solidFill>
-              <a:srgbClr val="1D4ED8"/>
-            </a:solidFill>
-          </a:ln>
-        </p:spPr>
-        <p:txBody>
-          <a:bodyPr wrap="square" lIns="76200" tIns="76200" rIns="76200" bIns="76200" rtlCol="0" anchor="t"/>
-          <a:lstStyle/>
-          <a:p>
-            <a:pPr algn="ctr" indent="0" marL="0">
-              <a:buNone/>
-            </a:pPr>
-            <a:r>
-              <a:rPr lang="en-US" sz="1500" b="1" dirty="0">
-                <a:solidFill>
-                  <a:srgbClr val="1E3A8A"/>
-                </a:solidFill>
-                <a:latin typeface="Arial" pitchFamily="34" charset="0"/>
-                <a:ea typeface="Arial" pitchFamily="34" charset="-122"/>
-                <a:cs typeface="Arial" pitchFamily="34" charset="-120"/>
-              </a:rPr>
-              <a:t>Last-meter disambiguation</a:t>
-            </a:r>
-            <a:endParaRPr lang="en-US" sz="1500" dirty="0"/>
-          </a:p>
-          <a:p>
-            <a:pPr algn="ctr" indent="0" marL="0">
-              <a:buNone/>
-            </a:pPr>
-            <a:r>
-              <a:rPr lang="en-US" sz="1200" dirty="0">
-                <a:solidFill>
-                  <a:srgbClr val="1D4ED8"/>
-                </a:solidFill>
-                <a:latin typeface="Arial" pitchFamily="34" charset="0"/>
-                <a:ea typeface="Arial" pitchFamily="34" charset="-122"/>
-                <a:cs typeface="Arial" pitchFamily="34" charset="-120"/>
-              </a:rPr>
-              <a:t>hint projected into grasp camera</a:t>
-            </a:r>
-            <a:endParaRPr lang="en-US" sz="1500" dirty="0"/>
-          </a:p>
-        </p:txBody>
-      </p:sp>
-      <p:sp>
-        <p:nvSpPr>
-          <p:cNvPr id="32" name="Text 25"/>
-          <p:cNvSpPr/>
-          <p:nvPr/>
-        </p:nvSpPr>
-        <p:spPr>
-          <a:xfrm>
-            <a:off x="9522000" y="3150000"/>
-            <a:ext cx="3132000" cy="468000"/>
-          </a:xfrm>
-          <a:prstGeom prst="roundRect">
-            <a:avLst>
-              <a:gd name="adj" fmla="val 7815"/>
-            </a:avLst>
-          </a:prstGeom>
-          <a:solidFill>
-            <a:srgbClr val="F3F4F6"/>
-          </a:solidFill>
-          <a:ln w="12700">
-            <a:solidFill>
-              <a:srgbClr val="9CA3AF"/>
-            </a:solidFill>
-            <a:prstDash val="dash"/>
-          </a:ln>
-        </p:spPr>
-        <p:txBody>
-          <a:bodyPr wrap="square" lIns="50800" tIns="50800" rIns="50800" bIns="50800" rtlCol="0" anchor="ctr"/>
-          <a:lstStyle/>
-          <a:p>
-            <a:pPr algn="ctr" indent="0" marL="0">
-              <a:buNone/>
-            </a:pPr>
-            <a:r>
-              <a:rPr lang="en-US" sz="1100" i="1" dirty="0">
-                <a:solidFill>
-                  <a:srgbClr val="6B7280"/>
-                </a:solidFill>
-                <a:latin typeface="Arial" pitchFamily="34" charset="0"/>
-                <a:ea typeface="Arial" pitchFamily="34" charset="-122"/>
-                <a:cs typeface="Arial" pitchFamily="34" charset="-120"/>
-              </a:rPr>
-              <a:t>lastmeter.jpg — projected point inside chosen box</a:t>
-            </a:r>
-            <a:endParaRPr lang="en-US" sz="1100" dirty="0"/>
-          </a:p>
-        </p:txBody>
-      </p:sp>
-      <p:sp>
-        <p:nvSpPr>
-          <p:cNvPr id="33" name="Shape 26"/>
+          <p:cNvPr id="36" name="Shape 26"/>
           <p:cNvSpPr/>
           <p:nvPr/>
         </p:nvSpPr>
@@ -2126,7 +2123,7 @@
       </p:sp>
       <p:sp>
         <p:nvSpPr>
-          <p:cNvPr id="34" name="Shape 27"/>
+          <p:cNvPr id="37" name="Shape 27"/>
           <p:cNvSpPr/>
           <p:nvPr/>
         </p:nvSpPr>
@@ -2150,7 +2147,7 @@
       </p:sp>
       <p:sp>
         <p:nvSpPr>
-          <p:cNvPr id="35" name="Shape 28"/>
+          <p:cNvPr id="38" name="Shape 28"/>
           <p:cNvSpPr/>
           <p:nvPr/>
         </p:nvSpPr>
@@ -2174,7 +2171,7 @@
       </p:sp>
       <p:sp>
         <p:nvSpPr>
-          <p:cNvPr id="36" name="Shape 29"/>
+          <p:cNvPr id="39" name="Shape 29"/>
           <p:cNvSpPr/>
           <p:nvPr/>
         </p:nvSpPr>
@@ -2198,7 +2195,7 @@
       </p:sp>
       <p:sp>
         <p:nvSpPr>
-          <p:cNvPr id="37" name="Shape 30"/>
+          <p:cNvPr id="40" name="Shape 30"/>
           <p:cNvSpPr/>
           <p:nvPr/>
         </p:nvSpPr>
@@ -2222,7 +2219,7 @@
       </p:sp>
       <p:sp>
         <p:nvSpPr>
-          <p:cNvPr id="38" name="Text 31"/>
+          <p:cNvPr id="41" name="Text 31"/>
           <p:cNvSpPr/>
           <p:nvPr/>
         </p:nvSpPr>
@@ -2284,57 +2281,32 @@
           </a:p>
         </p:txBody>
       </p:sp>
-      <p:sp>
-        <p:nvSpPr>
-          <p:cNvPr id="39" name="Text 32"/>
-          <p:cNvSpPr/>
-          <p:nvPr/>
-        </p:nvSpPr>
+      <p:pic>
+        <p:nvPicPr>
+          <p:cNvPr id="42" name="Image 8" descr="E:/3dgs_gaze/paper/fig2_assets/speech_wave.png">    </p:cNvPr>
+          <p:cNvPicPr>
+            <a:picLocks noChangeAspect="1"/>
+          </p:cNvPicPr>
+          <p:nvPr/>
+        </p:nvPicPr>
+        <p:blipFill>
+          <a:blip r:embed="rId9"/>
+          <a:srcRect l="0" r="0" t="0" b="0"/>
+          <a:stretch/>
+        </p:blipFill>
         <p:spPr>
           <a:xfrm>
             <a:off x="306000" y="4374000"/>
             <a:ext cx="2088000" cy="378000"/>
           </a:xfrm>
-          <a:prstGeom prst="roundRect">
-            <a:avLst>
-              <a:gd name="adj" fmla="val 9676"/>
-            </a:avLst>
-          </a:prstGeom>
-          <a:solidFill>
-            <a:srgbClr val="F3F4F6"/>
-          </a:solidFill>
-          <a:ln w="12700">
-            <a:solidFill>
-              <a:srgbClr val="9CA3AF"/>
-            </a:solidFill>
-            <a:prstDash val="dash"/>
-          </a:ln>
-        </p:spPr>
-        <p:txBody>
-          <a:bodyPr wrap="square" lIns="50800" tIns="50800" rIns="50800" bIns="50800" rtlCol="0" anchor="ctr"/>
-          <a:lstStyle/>
-          <a:p>
-            <a:pPr algn="ctr" indent="0" marL="0">
-              <a:buNone/>
-            </a:pPr>
-            <a:r>
-              <a:rPr lang="en-US" sz="1100" i="1" dirty="0">
-                <a:solidFill>
-                  <a:srgbClr val="6B7280"/>
-                </a:solidFill>
-                <a:latin typeface="Arial" pitchFamily="34" charset="0"/>
-                <a:ea typeface="Arial" pitchFamily="34" charset="-122"/>
-                <a:cs typeface="Arial" pitchFamily="34" charset="-120"/>
-              </a:rPr>
-              <a:t>speech_wave.png</a:t>
-            </a:r>
-            <a:endParaRPr lang="en-US" sz="1100" dirty="0"/>
-          </a:p>
-        </p:txBody>
-      </p:sp>
-      <p:sp>
-        <p:nvSpPr>
-          <p:cNvPr id="40" name="Text 33"/>
+          <a:prstGeom prst="rect">
+            <a:avLst/>
+          </a:prstGeom>
+        </p:spPr>
+      </p:pic>
+      <p:sp>
+        <p:nvSpPr>
+          <p:cNvPr id="43" name="Text 32"/>
           <p:cNvSpPr/>
           <p:nvPr/>
         </p:nvSpPr>
@@ -2398,7 +2370,7 @@
       </p:sp>
       <p:sp>
         <p:nvSpPr>
-          <p:cNvPr id="41" name="Text 34"/>
+          <p:cNvPr id="44" name="Text 33"/>
           <p:cNvSpPr/>
           <p:nvPr/>
         </p:nvSpPr>
@@ -2454,7 +2426,7 @@
       </p:sp>
       <p:sp>
         <p:nvSpPr>
-          <p:cNvPr id="42" name="Text 35"/>
+          <p:cNvPr id="45" name="Text 34"/>
           <p:cNvSpPr/>
           <p:nvPr/>
         </p:nvSpPr>
@@ -2518,7 +2490,7 @@
       </p:sp>
       <p:sp>
         <p:nvSpPr>
-          <p:cNvPr id="43" name="Text 36"/>
+          <p:cNvPr id="46" name="Text 35"/>
           <p:cNvSpPr/>
           <p:nvPr/>
         </p:nvSpPr>
@@ -2574,7 +2546,7 @@
       </p:sp>
       <p:sp>
         <p:nvSpPr>
-          <p:cNvPr id="44" name="Text 37"/>
+          <p:cNvPr id="47" name="Text 36"/>
           <p:cNvSpPr/>
           <p:nvPr/>
         </p:nvSpPr>
@@ -2638,7 +2610,7 @@
       </p:sp>
       <p:sp>
         <p:nvSpPr>
-          <p:cNvPr id="45" name="Text 38"/>
+          <p:cNvPr id="48" name="Text 37"/>
           <p:cNvSpPr/>
           <p:nvPr/>
         </p:nvSpPr>
@@ -2711,7 +2683,7 @@
       </p:sp>
       <p:sp>
         <p:nvSpPr>
-          <p:cNvPr id="46" name="Text 39"/>
+          <p:cNvPr id="49" name="Text 38"/>
           <p:cNvSpPr/>
           <p:nvPr/>
         </p:nvSpPr>
@@ -2773,57 +2745,61 @@
           </a:p>
         </p:txBody>
       </p:sp>
-      <p:sp>
-        <p:nvSpPr>
-          <p:cNvPr id="47" name="Text 40"/>
-          <p:cNvSpPr/>
-          <p:nvPr/>
-        </p:nvSpPr>
+      <p:pic>
+        <p:nvPicPr>
+          <p:cNvPr id="50" name="Image 9" descr="E:/3dgs_gaze/paper/fig2_assets/delivery.jpg">    </p:cNvPr>
+          <p:cNvPicPr>
+            <a:picLocks noChangeAspect="1"/>
+          </p:cNvPicPr>
+          <p:nvPr/>
+        </p:nvPicPr>
+        <p:blipFill>
+          <a:blip r:embed="rId10"/>
+          <a:srcRect l="0" r="0" t="0" b="0"/>
+          <a:stretch/>
+        </p:blipFill>
         <p:spPr>
           <a:xfrm>
             <a:off x="10566000" y="4374000"/>
             <a:ext cx="2088000" cy="378000"/>
           </a:xfrm>
+          <a:prstGeom prst="rect">
+            <a:avLst/>
+          </a:prstGeom>
+        </p:spPr>
+      </p:pic>
+      <p:sp>
+        <p:nvSpPr>
+          <p:cNvPr id="51" name="Shape 39"/>
+          <p:cNvSpPr/>
+          <p:nvPr/>
+        </p:nvSpPr>
+        <p:spPr>
+          <a:xfrm>
+            <a:off x="10566000" y="4374000"/>
+            <a:ext cx="2088000" cy="378000"/>
+          </a:xfrm>
           <a:prstGeom prst="roundRect">
             <a:avLst>
-              <a:gd name="adj" fmla="val 9676"/>
+              <a:gd name="adj" fmla="val 4838"/>
             </a:avLst>
           </a:prstGeom>
           <a:solidFill>
-            <a:srgbClr val="F3F4F6"/>
-          </a:solidFill>
-          <a:ln w="12700">
+            <a:srgbClr val="FFFFFF">
+              <a:alpha val="0"/>
+            </a:srgbClr>
+          </a:solidFill>
+          <a:ln w="9525">
             <a:solidFill>
               <a:srgbClr val="9CA3AF"/>
             </a:solidFill>
-            <a:prstDash val="dash"/>
-          </a:ln>
-        </p:spPr>
-        <p:txBody>
-          <a:bodyPr wrap="square" lIns="50800" tIns="50800" rIns="50800" bIns="50800" rtlCol="0" anchor="ctr"/>
-          <a:lstStyle/>
-          <a:p>
-            <a:pPr algn="ctr" indent="0" marL="0">
-              <a:buNone/>
-            </a:pPr>
-            <a:r>
-              <a:rPr lang="en-US" sz="1100" i="1" dirty="0">
-                <a:solidFill>
-                  <a:srgbClr val="6B7280"/>
-                </a:solidFill>
-                <a:latin typeface="Arial" pitchFamily="34" charset="0"/>
-                <a:ea typeface="Arial" pitchFamily="34" charset="-122"/>
-                <a:cs typeface="Arial" pitchFamily="34" charset="-120"/>
-              </a:rPr>
-              <a:t>delivery.jpg</a:t>
-            </a:r>
-            <a:endParaRPr lang="en-US" sz="1100" dirty="0"/>
-          </a:p>
-        </p:txBody>
-      </p:sp>
-      <p:sp>
-        <p:nvSpPr>
-          <p:cNvPr id="48" name="Shape 41"/>
+            <a:prstDash val="solid"/>
+          </a:ln>
+        </p:spPr>
+      </p:sp>
+      <p:sp>
+        <p:nvSpPr>
+          <p:cNvPr id="52" name="Shape 40"/>
           <p:cNvSpPr/>
           <p:nvPr/>
         </p:nvSpPr>
@@ -2847,7 +2823,7 @@
       </p:sp>
       <p:sp>
         <p:nvSpPr>
-          <p:cNvPr id="49" name="Shape 42"/>
+          <p:cNvPr id="53" name="Shape 41"/>
           <p:cNvSpPr/>
           <p:nvPr/>
         </p:nvSpPr>
@@ -2871,7 +2847,7 @@
       </p:sp>
       <p:sp>
         <p:nvSpPr>
-          <p:cNvPr id="50" name="Shape 43"/>
+          <p:cNvPr id="54" name="Shape 42"/>
           <p:cNvSpPr/>
           <p:nvPr/>
         </p:nvSpPr>
@@ -2895,7 +2871,7 @@
       </p:sp>
       <p:sp>
         <p:nvSpPr>
-          <p:cNvPr id="51" name="Shape 44"/>
+          <p:cNvPr id="55" name="Shape 43"/>
           <p:cNvSpPr/>
           <p:nvPr/>
         </p:nvSpPr>
@@ -2919,7 +2895,7 @@
       </p:sp>
       <p:sp>
         <p:nvSpPr>
-          <p:cNvPr id="52" name="Shape 45"/>
+          <p:cNvPr id="56" name="Shape 44"/>
           <p:cNvSpPr/>
           <p:nvPr/>
         </p:nvSpPr>
@@ -2943,7 +2919,7 @@
       </p:sp>
       <p:sp>
         <p:nvSpPr>
-          <p:cNvPr id="53" name="Shape 46"/>
+          <p:cNvPr id="57" name="Shape 45"/>
           <p:cNvSpPr/>
           <p:nvPr/>
         </p:nvSpPr>
@@ -2970,7 +2946,7 @@
       </p:sp>
       <p:sp>
         <p:nvSpPr>
-          <p:cNvPr id="54" name="Text 47"/>
+          <p:cNvPr id="58" name="Text 46"/>
           <p:cNvSpPr/>
           <p:nvPr/>
         </p:nvSpPr>
@@ -3009,7 +2985,7 @@
       </p:sp>
       <p:sp>
         <p:nvSpPr>
-          <p:cNvPr id="55" name="Shape 48"/>
+          <p:cNvPr id="59" name="Shape 47"/>
           <p:cNvSpPr/>
           <p:nvPr/>
         </p:nvSpPr>
@@ -3036,7 +3012,7 @@
       </p:sp>
       <p:sp>
         <p:nvSpPr>
-          <p:cNvPr id="56" name="Text 49"/>
+          <p:cNvPr id="60" name="Text 48"/>
           <p:cNvSpPr/>
           <p:nvPr/>
         </p:nvSpPr>
@@ -3075,7 +3051,7 @@
       </p:sp>
       <p:sp>
         <p:nvSpPr>
-          <p:cNvPr id="57" name="Shape 50"/>
+          <p:cNvPr id="61" name="Shape 49"/>
           <p:cNvSpPr/>
           <p:nvPr/>
         </p:nvSpPr>
@@ -3102,7 +3078,7 @@
       </p:sp>
       <p:sp>
         <p:nvSpPr>
-          <p:cNvPr id="58" name="Text 51"/>
+          <p:cNvPr id="62" name="Text 50"/>
           <p:cNvSpPr/>
           <p:nvPr/>
         </p:nvSpPr>
@@ -3141,7 +3117,7 @@
       </p:sp>
       <p:sp>
         <p:nvSpPr>
-          <p:cNvPr id="59" name="Shape 52"/>
+          <p:cNvPr id="63" name="Shape 51"/>
           <p:cNvSpPr/>
           <p:nvPr/>
         </p:nvSpPr>
@@ -3168,7 +3144,7 @@
       </p:sp>
       <p:sp>
         <p:nvSpPr>
-          <p:cNvPr id="60" name="Text 53"/>
+          <p:cNvPr id="64" name="Text 52"/>
           <p:cNvSpPr/>
           <p:nvPr/>
         </p:nvSpPr>
@@ -3207,7 +3183,7 @@
       </p:sp>
       <p:sp>
         <p:nvSpPr>
-          <p:cNvPr id="61" name="Shape 54"/>
+          <p:cNvPr id="65" name="Shape 53"/>
           <p:cNvSpPr/>
           <p:nvPr/>
         </p:nvSpPr>
@@ -3234,7 +3210,7 @@
       </p:sp>
       <p:sp>
         <p:nvSpPr>
-          <p:cNvPr id="62" name="Text 55"/>
+          <p:cNvPr id="66" name="Text 54"/>
           <p:cNvSpPr/>
           <p:nvPr/>
         </p:nvSpPr>
@@ -3273,7 +3249,7 @@
       </p:sp>
       <p:sp>
         <p:nvSpPr>
-          <p:cNvPr id="63" name="Shape 56"/>
+          <p:cNvPr id="67" name="Shape 55"/>
           <p:cNvSpPr/>
           <p:nvPr/>
         </p:nvSpPr>
@@ -3300,7 +3276,7 @@
       </p:sp>
       <p:sp>
         <p:nvSpPr>
-          <p:cNvPr id="64" name="Text 57"/>
+          <p:cNvPr id="68" name="Text 56"/>
           <p:cNvSpPr/>
           <p:nvPr/>
         </p:nvSpPr>

--- a/paper/fig2_assets/fig2_skeleton.pptx
+++ b/paper/fig2_assets/fig2_skeleton.pptx
@@ -1533,7 +1533,7 @@
       </p:sp>
       <p:sp>
         <p:nvSpPr>
-          <p:cNvPr id="22" name="Text 16"/>
+          <p:cNvPr id="22" name="Shape 16"/>
           <p:cNvSpPr/>
           <p:nvPr/>
         </p:nvSpPr>
@@ -1554,17 +1554,36 @@
             <a:solidFill>
               <a:srgbClr val="D97706"/>
             </a:solidFill>
-          </a:ln>
+            <a:prstDash val="solid"/>
+          </a:ln>
+        </p:spPr>
+      </p:sp>
+      <p:sp>
+        <p:nvSpPr>
+          <p:cNvPr id="23" name="Text 17"/>
+          <p:cNvSpPr/>
+          <p:nvPr/>
+        </p:nvSpPr>
+        <p:spPr>
+          <a:xfrm>
+            <a:off x="270000" y="1476000"/>
+            <a:ext cx="1332000" cy="936000"/>
+          </a:xfrm>
+          <a:prstGeom prst="rect">
+            <a:avLst/>
+          </a:prstGeom>
+          <a:noFill/>
+          <a:ln/>
         </p:spPr>
         <p:txBody>
-          <a:bodyPr wrap="square" lIns="76200" tIns="76200" rIns="76200" bIns="76200" rtlCol="0" anchor="t"/>
+          <a:bodyPr wrap="square" lIns="0" tIns="0" rIns="0" bIns="0" rtlCol="0" anchor="ctr"/>
           <a:lstStyle/>
           <a:p>
-            <a:pPr algn="ctr" indent="0" marL="0">
-              <a:buNone/>
-            </a:pPr>
-            <a:r>
-              <a:rPr lang="en-US" sz="1500" b="1" dirty="0">
+            <a:pPr algn="l" indent="0" marL="0">
+              <a:buNone/>
+            </a:pPr>
+            <a:r>
+              <a:rPr lang="en-US" sz="1400" b="1" dirty="0">
                 <a:solidFill>
                   <a:srgbClr val="92400E"/>
                 </a:solidFill>
@@ -1574,14 +1593,14 @@
               </a:rPr>
               <a:t>Wearer localization</a:t>
             </a:r>
-            <a:endParaRPr lang="en-US" sz="1500" dirty="0"/>
-          </a:p>
-          <a:p>
-            <a:pPr algn="ctr" indent="0" marL="0">
-              <a:buNone/>
-            </a:pPr>
-            <a:r>
-              <a:rPr lang="en-US" sz="1200" dirty="0">
+            <a:endParaRPr lang="en-US" sz="1400" dirty="0"/>
+          </a:p>
+          <a:p>
+            <a:pPr algn="l" indent="0" marL="0">
+              <a:buNone/>
+            </a:pPr>
+            <a:r>
+              <a:rPr lang="en-US" sz="1150" dirty="0">
                 <a:solidFill>
                   <a:srgbClr val="A16207"/>
                 </a:solidFill>
@@ -1591,13 +1610,13 @@
               </a:rPr>
               <a:t>fisheye ArUco PnP vs. wall tags</a:t>
             </a:r>
-            <a:endParaRPr lang="en-US" sz="1500" dirty="0"/>
+            <a:endParaRPr lang="en-US" sz="1400" dirty="0"/>
           </a:p>
         </p:txBody>
       </p:sp>
       <p:pic>
         <p:nvPicPr>
-          <p:cNvPr id="23" name="Image 4" descr="E:/3dgs_gaze/paper/fig2_assets/wearer_pnp.jpg">    </p:cNvPr>
+          <p:cNvPr id="24" name="Image 4" descr="E:/3dgs_gaze/paper/fig2_assets/wearer_pnp.jpg">    </p:cNvPr>
           <p:cNvPicPr>
             <a:picLocks noChangeAspect="1"/>
           </p:cNvPicPr>
@@ -1610,8 +1629,8 @@
         </p:blipFill>
         <p:spPr>
           <a:xfrm>
-            <a:off x="306000" y="1944000"/>
-            <a:ext cx="2844000" cy="468000"/>
+            <a:off x="1638000" y="1494000"/>
+            <a:ext cx="1404000" cy="900000"/>
           </a:xfrm>
           <a:prstGeom prst="rect">
             <a:avLst/>
@@ -1620,18 +1639,18 @@
       </p:pic>
       <p:sp>
         <p:nvSpPr>
-          <p:cNvPr id="24" name="Shape 17"/>
-          <p:cNvSpPr/>
-          <p:nvPr/>
-        </p:nvSpPr>
-        <p:spPr>
-          <a:xfrm>
-            <a:off x="306000" y="1944000"/>
-            <a:ext cx="2844000" cy="468000"/>
+          <p:cNvPr id="25" name="Shape 18"/>
+          <p:cNvSpPr/>
+          <p:nvPr/>
+        </p:nvSpPr>
+        <p:spPr>
+          <a:xfrm>
+            <a:off x="1638000" y="1494000"/>
+            <a:ext cx="1404000" cy="900000"/>
           </a:xfrm>
           <a:prstGeom prst="roundRect">
             <a:avLst>
-              <a:gd name="adj" fmla="val 3908"/>
+              <a:gd name="adj" fmla="val 2032"/>
             </a:avLst>
           </a:prstGeom>
           <a:solidFill>
@@ -1649,7 +1668,7 @@
       </p:sp>
       <p:sp>
         <p:nvSpPr>
-          <p:cNvPr id="25" name="Shape 18"/>
+          <p:cNvPr id="26" name="Shape 19"/>
           <p:cNvSpPr/>
           <p:nvPr/>
         </p:nvSpPr>
@@ -1676,7 +1695,7 @@
       </p:sp>
       <p:sp>
         <p:nvSpPr>
-          <p:cNvPr id="26" name="Text 19"/>
+          <p:cNvPr id="27" name="Text 20"/>
           <p:cNvSpPr/>
           <p:nvPr/>
         </p:nvSpPr>
@@ -1732,7 +1751,7 @@
       </p:sp>
       <p:pic>
         <p:nvPicPr>
-          <p:cNvPr id="27" name="Image 5" descr="E:/3dgs_gaze/paper/fig2_assets/wearer_cluster.png">    </p:cNvPr>
+          <p:cNvPr id="28" name="Image 5" descr="E:/3dgs_gaze/paper/fig2_assets/wearer_cluster.png">    </p:cNvPr>
           <p:cNvPicPr>
             <a:picLocks noChangeAspect="1"/>
           </p:cNvPicPr>
@@ -1755,7 +1774,7 @@
       </p:pic>
       <p:sp>
         <p:nvSpPr>
-          <p:cNvPr id="28" name="Text 20"/>
+          <p:cNvPr id="29" name="Text 21"/>
           <p:cNvSpPr/>
           <p:nvPr/>
         </p:nvSpPr>
@@ -1819,7 +1838,7 @@
       </p:sp>
       <p:pic>
         <p:nvPicPr>
-          <p:cNvPr id="29" name="Image 6" descr="E:/3dgs_gaze/paper/fig2_assets/hub_map.jpg">    </p:cNvPr>
+          <p:cNvPr id="30" name="Image 6" descr="E:/3dgs_gaze/paper/fig2_assets/hub_map.jpg">    </p:cNvPr>
           <p:cNvPicPr>
             <a:picLocks noChangeAspect="1"/>
           </p:cNvPicPr>
@@ -1842,7 +1861,7 @@
       </p:pic>
       <p:sp>
         <p:nvSpPr>
-          <p:cNvPr id="30" name="Shape 21"/>
+          <p:cNvPr id="31" name="Shape 22"/>
           <p:cNvSpPr/>
           <p:nvPr/>
         </p:nvSpPr>
@@ -1871,7 +1890,7 @@
       </p:sp>
       <p:sp>
         <p:nvSpPr>
-          <p:cNvPr id="31" name="Text 22"/>
+          <p:cNvPr id="32" name="Shape 23"/>
           <p:cNvSpPr/>
           <p:nvPr/>
         </p:nvSpPr>
@@ -1892,17 +1911,36 @@
             <a:solidFill>
               <a:srgbClr val="1D4ED8"/>
             </a:solidFill>
-          </a:ln>
+            <a:prstDash val="solid"/>
+          </a:ln>
+        </p:spPr>
+      </p:sp>
+      <p:sp>
+        <p:nvSpPr>
+          <p:cNvPr id="33" name="Text 24"/>
+          <p:cNvSpPr/>
+          <p:nvPr/>
+        </p:nvSpPr>
+        <p:spPr>
+          <a:xfrm>
+            <a:off x="9486000" y="1476000"/>
+            <a:ext cx="1440000" cy="936000"/>
+          </a:xfrm>
+          <a:prstGeom prst="rect">
+            <a:avLst/>
+          </a:prstGeom>
+          <a:noFill/>
+          <a:ln/>
         </p:spPr>
         <p:txBody>
-          <a:bodyPr wrap="square" lIns="76200" tIns="76200" rIns="76200" bIns="76200" rtlCol="0" anchor="t"/>
+          <a:bodyPr wrap="square" lIns="0" tIns="0" rIns="0" bIns="0" rtlCol="0" anchor="ctr"/>
           <a:lstStyle/>
           <a:p>
-            <a:pPr algn="ctr" indent="0" marL="0">
-              <a:buNone/>
-            </a:pPr>
-            <a:r>
-              <a:rPr lang="en-US" sz="1500" b="1" dirty="0">
+            <a:pPr algn="l" indent="0" marL="0">
+              <a:buNone/>
+            </a:pPr>
+            <a:r>
+              <a:rPr lang="en-US" sz="1400" b="1" dirty="0">
                 <a:solidFill>
                   <a:srgbClr val="1E3A8A"/>
                 </a:solidFill>
@@ -1912,14 +1950,14 @@
               </a:rPr>
               <a:t>Robot localization &amp; navigation</a:t>
             </a:r>
-            <a:endParaRPr lang="en-US" sz="1500" dirty="0"/>
-          </a:p>
-          <a:p>
-            <a:pPr algn="ctr" indent="0" marL="0">
-              <a:buNone/>
-            </a:pPr>
-            <a:r>
-              <a:rPr lang="en-US" sz="1200" dirty="0">
+            <a:endParaRPr lang="en-US" sz="1400" dirty="0"/>
+          </a:p>
+          <a:p>
+            <a:pPr algn="l" indent="0" marL="0">
+              <a:buNone/>
+            </a:pPr>
+            <a:r>
+              <a:rPr lang="en-US" sz="1150" dirty="0">
                 <a:solidFill>
                   <a:srgbClr val="1D4ED8"/>
                 </a:solidFill>
@@ -1929,13 +1967,13 @@
               </a:rPr>
               <a:t>same surveyed tags</a:t>
             </a:r>
-            <a:endParaRPr lang="en-US" sz="1500" dirty="0"/>
+            <a:endParaRPr lang="en-US" sz="1400" dirty="0"/>
           </a:p>
         </p:txBody>
       </p:sp>
       <p:pic>
         <p:nvPicPr>
-          <p:cNvPr id="32" name="Image 7" descr="E:/3dgs_gaze/paper/fig2_assets/robot_nav.jpg">    </p:cNvPr>
+          <p:cNvPr id="34" name="Image 7" descr="E:/3dgs_gaze/paper/fig2_assets/robot_nav.jpg">    </p:cNvPr>
           <p:cNvPicPr>
             <a:picLocks noChangeAspect="1"/>
           </p:cNvPicPr>
@@ -1948,8 +1986,8 @@
         </p:blipFill>
         <p:spPr>
           <a:xfrm>
-            <a:off x="9522000" y="1944000"/>
-            <a:ext cx="3132000" cy="468000"/>
+            <a:off x="11016000" y="1494000"/>
+            <a:ext cx="1656000" cy="900000"/>
           </a:xfrm>
           <a:prstGeom prst="rect">
             <a:avLst/>
@@ -1958,18 +1996,18 @@
       </p:pic>
       <p:sp>
         <p:nvSpPr>
-          <p:cNvPr id="33" name="Shape 23"/>
-          <p:cNvSpPr/>
-          <p:nvPr/>
-        </p:nvSpPr>
-        <p:spPr>
-          <a:xfrm>
-            <a:off x="9522000" y="1944000"/>
-            <a:ext cx="3132000" cy="468000"/>
+          <p:cNvPr id="35" name="Shape 25"/>
+          <p:cNvSpPr/>
+          <p:nvPr/>
+        </p:nvSpPr>
+        <p:spPr>
+          <a:xfrm>
+            <a:off x="11016000" y="1494000"/>
+            <a:ext cx="1656000" cy="900000"/>
           </a:xfrm>
           <a:prstGeom prst="roundRect">
             <a:avLst>
-              <a:gd name="adj" fmla="val 3908"/>
+              <a:gd name="adj" fmla="val 2032"/>
             </a:avLst>
           </a:prstGeom>
           <a:solidFill>
@@ -1987,7 +2025,7 @@
       </p:sp>
       <p:sp>
         <p:nvSpPr>
-          <p:cNvPr id="34" name="Text 24"/>
+          <p:cNvPr id="36" name="Shape 26"/>
           <p:cNvSpPr/>
           <p:nvPr/>
         </p:nvSpPr>
@@ -2008,17 +2046,36 @@
             <a:solidFill>
               <a:srgbClr val="1D4ED8"/>
             </a:solidFill>
-          </a:ln>
+            <a:prstDash val="solid"/>
+          </a:ln>
+        </p:spPr>
+      </p:sp>
+      <p:sp>
+        <p:nvSpPr>
+          <p:cNvPr id="37" name="Text 27"/>
+          <p:cNvSpPr/>
+          <p:nvPr/>
+        </p:nvSpPr>
+        <p:spPr>
+          <a:xfrm>
+            <a:off x="9486000" y="2682000"/>
+            <a:ext cx="1440000" cy="936000"/>
+          </a:xfrm>
+          <a:prstGeom prst="rect">
+            <a:avLst/>
+          </a:prstGeom>
+          <a:noFill/>
+          <a:ln/>
         </p:spPr>
         <p:txBody>
-          <a:bodyPr wrap="square" lIns="76200" tIns="76200" rIns="76200" bIns="76200" rtlCol="0" anchor="t"/>
+          <a:bodyPr wrap="square" lIns="0" tIns="0" rIns="0" bIns="0" rtlCol="0" anchor="ctr"/>
           <a:lstStyle/>
           <a:p>
-            <a:pPr algn="ctr" indent="0" marL="0">
-              <a:buNone/>
-            </a:pPr>
-            <a:r>
-              <a:rPr lang="en-US" sz="1500" b="1" dirty="0">
+            <a:pPr algn="l" indent="0" marL="0">
+              <a:buNone/>
+            </a:pPr>
+            <a:r>
+              <a:rPr lang="en-US" sz="1400" b="1" dirty="0">
                 <a:solidFill>
                   <a:srgbClr val="1E3A8A"/>
                 </a:solidFill>
@@ -2028,14 +2085,14 @@
               </a:rPr>
               <a:t>Last-meter disambiguation</a:t>
             </a:r>
-            <a:endParaRPr lang="en-US" sz="1500" dirty="0"/>
-          </a:p>
-          <a:p>
-            <a:pPr algn="ctr" indent="0" marL="0">
-              <a:buNone/>
-            </a:pPr>
-            <a:r>
-              <a:rPr lang="en-US" sz="1200" dirty="0">
+            <a:endParaRPr lang="en-US" sz="1400" dirty="0"/>
+          </a:p>
+          <a:p>
+            <a:pPr algn="l" indent="0" marL="0">
+              <a:buNone/>
+            </a:pPr>
+            <a:r>
+              <a:rPr lang="en-US" sz="1150" dirty="0">
                 <a:solidFill>
                   <a:srgbClr val="1D4ED8"/>
                 </a:solidFill>
@@ -2045,24 +2102,24 @@
               </a:rPr>
               <a:t>hint projected into grasp camera</a:t>
             </a:r>
-            <a:endParaRPr lang="en-US" sz="1500" dirty="0"/>
+            <a:endParaRPr lang="en-US" sz="1400" dirty="0"/>
           </a:p>
         </p:txBody>
       </p:sp>
       <p:sp>
         <p:nvSpPr>
-          <p:cNvPr id="35" name="Text 25"/>
-          <p:cNvSpPr/>
-          <p:nvPr/>
-        </p:nvSpPr>
-        <p:spPr>
-          <a:xfrm>
-            <a:off x="9522000" y="3150000"/>
-            <a:ext cx="3132000" cy="468000"/>
+          <p:cNvPr id="38" name="Text 28"/>
+          <p:cNvSpPr/>
+          <p:nvPr/>
+        </p:nvSpPr>
+        <p:spPr>
+          <a:xfrm>
+            <a:off x="11016000" y="2700000"/>
+            <a:ext cx="1656000" cy="900000"/>
           </a:xfrm>
           <a:prstGeom prst="roundRect">
             <a:avLst>
-              <a:gd name="adj" fmla="val 7815"/>
+              <a:gd name="adj" fmla="val 4064"/>
             </a:avLst>
           </a:prstGeom>
           <a:solidFill>
@@ -2091,7 +2148,7 @@
                 <a:ea typeface="Arial" pitchFamily="34" charset="-122"/>
                 <a:cs typeface="Arial" pitchFamily="34" charset="-120"/>
               </a:rPr>
-              <a:t>lastmeter.jpg — projected point inside chosen box</a:t>
+              <a:t>lastmeter.jpg</a:t>
             </a:r>
             <a:endParaRPr lang="en-US" sz="1100" dirty="0"/>
           </a:p>
@@ -2099,7 +2156,7 @@
       </p:sp>
       <p:sp>
         <p:nvSpPr>
-          <p:cNvPr id="36" name="Shape 26"/>
+          <p:cNvPr id="39" name="Shape 29"/>
           <p:cNvSpPr/>
           <p:nvPr/>
         </p:nvSpPr>
@@ -2123,7 +2180,7 @@
       </p:sp>
       <p:sp>
         <p:nvSpPr>
-          <p:cNvPr id="37" name="Shape 27"/>
+          <p:cNvPr id="40" name="Shape 30"/>
           <p:cNvSpPr/>
           <p:nvPr/>
         </p:nvSpPr>
@@ -2147,7 +2204,7 @@
       </p:sp>
       <p:sp>
         <p:nvSpPr>
-          <p:cNvPr id="38" name="Shape 28"/>
+          <p:cNvPr id="41" name="Shape 31"/>
           <p:cNvSpPr/>
           <p:nvPr/>
         </p:nvSpPr>
@@ -2171,7 +2228,7 @@
       </p:sp>
       <p:sp>
         <p:nvSpPr>
-          <p:cNvPr id="39" name="Shape 29"/>
+          <p:cNvPr id="42" name="Shape 32"/>
           <p:cNvSpPr/>
           <p:nvPr/>
         </p:nvSpPr>
@@ -2195,7 +2252,7 @@
       </p:sp>
       <p:sp>
         <p:nvSpPr>
-          <p:cNvPr id="40" name="Shape 30"/>
+          <p:cNvPr id="43" name="Shape 33"/>
           <p:cNvSpPr/>
           <p:nvPr/>
         </p:nvSpPr>
@@ -2219,7 +2276,7 @@
       </p:sp>
       <p:sp>
         <p:nvSpPr>
-          <p:cNvPr id="41" name="Text 31"/>
+          <p:cNvPr id="44" name="Text 34"/>
           <p:cNvSpPr/>
           <p:nvPr/>
         </p:nvSpPr>
@@ -2283,7 +2340,7 @@
       </p:sp>
       <p:pic>
         <p:nvPicPr>
-          <p:cNvPr id="42" name="Image 8" descr="E:/3dgs_gaze/paper/fig2_assets/speech_wave.png">    </p:cNvPr>
+          <p:cNvPr id="45" name="Image 8" descr="E:/3dgs_gaze/paper/fig2_assets/speech_wave_bare.png">    </p:cNvPr>
           <p:cNvPicPr>
             <a:picLocks noChangeAspect="1"/>
           </p:cNvPicPr>
@@ -2296,8 +2353,8 @@
         </p:blipFill>
         <p:spPr>
           <a:xfrm>
-            <a:off x="306000" y="4374000"/>
-            <a:ext cx="2088000" cy="378000"/>
+            <a:off x="306000" y="4356000"/>
+            <a:ext cx="2088000" cy="252000"/>
           </a:xfrm>
           <a:prstGeom prst="rect">
             <a:avLst/>
@@ -2306,7 +2363,46 @@
       </p:pic>
       <p:sp>
         <p:nvSpPr>
-          <p:cNvPr id="43" name="Text 32"/>
+          <p:cNvPr id="46" name="Text 35"/>
+          <p:cNvSpPr/>
+          <p:nvPr/>
+        </p:nvSpPr>
+        <p:spPr>
+          <a:xfrm>
+            <a:off x="306000" y="4626000"/>
+            <a:ext cx="2088000" cy="162000"/>
+          </a:xfrm>
+          <a:prstGeom prst="rect">
+            <a:avLst/>
+          </a:prstGeom>
+          <a:noFill/>
+          <a:ln/>
+        </p:spPr>
+        <p:txBody>
+          <a:bodyPr wrap="square" lIns="0" tIns="0" rIns="0" bIns="0" rtlCol="0" anchor="ctr"/>
+          <a:lstStyle/>
+          <a:p>
+            <a:pPr algn="ctr" indent="0" marL="0">
+              <a:buNone/>
+            </a:pPr>
+            <a:r>
+              <a:rPr lang="en-US" sz="1150" i="1" dirty="0">
+                <a:solidFill>
+                  <a:srgbClr val="374151"/>
+                </a:solidFill>
+                <a:latin typeface="Arial" pitchFamily="34" charset="0"/>
+                <a:ea typeface="Arial" pitchFamily="34" charset="-122"/>
+                <a:cs typeface="Arial" pitchFamily="34" charset="-120"/>
+              </a:rPr>
+              <a:t>→ “bring me that one”</a:t>
+            </a:r>
+            <a:endParaRPr lang="en-US" sz="1150" dirty="0"/>
+          </a:p>
+        </p:txBody>
+      </p:sp>
+      <p:sp>
+        <p:nvSpPr>
+          <p:cNvPr id="47" name="Text 36"/>
           <p:cNvSpPr/>
           <p:nvPr/>
         </p:nvSpPr>
@@ -2370,7 +2466,7 @@
       </p:sp>
       <p:sp>
         <p:nvSpPr>
-          <p:cNvPr id="44" name="Text 33"/>
+          <p:cNvPr id="48" name="Text 37"/>
           <p:cNvSpPr/>
           <p:nvPr/>
         </p:nvSpPr>
@@ -2426,7 +2522,7 @@
       </p:sp>
       <p:sp>
         <p:nvSpPr>
-          <p:cNvPr id="45" name="Text 34"/>
+          <p:cNvPr id="49" name="Text 38"/>
           <p:cNvSpPr/>
           <p:nvPr/>
         </p:nvSpPr>
@@ -2490,7 +2586,7 @@
       </p:sp>
       <p:sp>
         <p:nvSpPr>
-          <p:cNvPr id="46" name="Text 35"/>
+          <p:cNvPr id="50" name="Text 39"/>
           <p:cNvSpPr/>
           <p:nvPr/>
         </p:nvSpPr>
@@ -2546,7 +2642,7 @@
       </p:sp>
       <p:sp>
         <p:nvSpPr>
-          <p:cNvPr id="47" name="Text 36"/>
+          <p:cNvPr id="51" name="Text 40"/>
           <p:cNvSpPr/>
           <p:nvPr/>
         </p:nvSpPr>
@@ -2610,7 +2706,7 @@
       </p:sp>
       <p:sp>
         <p:nvSpPr>
-          <p:cNvPr id="48" name="Text 37"/>
+          <p:cNvPr id="52" name="Text 41"/>
           <p:cNvSpPr/>
           <p:nvPr/>
         </p:nvSpPr>
@@ -2683,7 +2779,7 @@
       </p:sp>
       <p:sp>
         <p:nvSpPr>
-          <p:cNvPr id="49" name="Text 38"/>
+          <p:cNvPr id="53" name="Shape 42"/>
           <p:cNvSpPr/>
           <p:nvPr/>
         </p:nvSpPr>
@@ -2704,17 +2800,36 @@
             <a:solidFill>
               <a:srgbClr val="1D4ED8"/>
             </a:solidFill>
-          </a:ln>
+            <a:prstDash val="solid"/>
+          </a:ln>
+        </p:spPr>
+      </p:sp>
+      <p:sp>
+        <p:nvSpPr>
+          <p:cNvPr id="54" name="Text 43"/>
+          <p:cNvSpPr/>
+          <p:nvPr/>
+        </p:nvSpPr>
+        <p:spPr>
+          <a:xfrm>
+            <a:off x="10530000" y="3924000"/>
+            <a:ext cx="936000" cy="828000"/>
+          </a:xfrm>
+          <a:prstGeom prst="rect">
+            <a:avLst/>
+          </a:prstGeom>
+          <a:noFill/>
+          <a:ln/>
         </p:spPr>
         <p:txBody>
-          <a:bodyPr wrap="square" lIns="76200" tIns="76200" rIns="76200" bIns="76200" rtlCol="0" anchor="t"/>
+          <a:bodyPr wrap="square" lIns="0" tIns="0" rIns="0" bIns="0" rtlCol="0" anchor="ctr"/>
           <a:lstStyle/>
           <a:p>
-            <a:pPr algn="ctr" indent="0" marL="0">
-              <a:buNone/>
-            </a:pPr>
-            <a:r>
-              <a:rPr lang="en-US" sz="1400" b="1" dirty="0">
+            <a:pPr algn="l" indent="0" marL="0">
+              <a:buNone/>
+            </a:pPr>
+            <a:r>
+              <a:rPr lang="en-US" sz="1300" b="1" dirty="0">
                 <a:solidFill>
                   <a:srgbClr val="1E3A8A"/>
                 </a:solidFill>
@@ -2724,14 +2839,14 @@
               </a:rPr>
               <a:t>Fetch &amp; delivery</a:t>
             </a:r>
-            <a:endParaRPr lang="en-US" sz="1400" dirty="0"/>
-          </a:p>
-          <a:p>
-            <a:pPr algn="ctr" indent="0" marL="0">
-              <a:buNone/>
-            </a:pPr>
-            <a:r>
-              <a:rPr lang="en-US" sz="1150" dirty="0">
+            <a:endParaRPr lang="en-US" sz="1300" dirty="0"/>
+          </a:p>
+          <a:p>
+            <a:pPr algn="l" indent="0" marL="0">
+              <a:buNone/>
+            </a:pPr>
+            <a:r>
+              <a:rPr lang="en-US" sz="1050" dirty="0">
                 <a:solidFill>
                   <a:srgbClr val="1D4ED8"/>
                 </a:solidFill>
@@ -2741,13 +2856,13 @@
               </a:rPr>
               <a:t>grasp + hand-over</a:t>
             </a:r>
-            <a:endParaRPr lang="en-US" sz="1400" dirty="0"/>
+            <a:endParaRPr lang="en-US" sz="1300" dirty="0"/>
           </a:p>
         </p:txBody>
       </p:sp>
       <p:pic>
         <p:nvPicPr>
-          <p:cNvPr id="50" name="Image 9" descr="E:/3dgs_gaze/paper/fig2_assets/delivery.jpg">    </p:cNvPr>
+          <p:cNvPr id="55" name="Image 9" descr="E:/3dgs_gaze/paper/fig2_assets/delivery.jpg">    </p:cNvPr>
           <p:cNvPicPr>
             <a:picLocks noChangeAspect="1"/>
           </p:cNvPicPr>
@@ -2760,8 +2875,8 @@
         </p:blipFill>
         <p:spPr>
           <a:xfrm>
-            <a:off x="10566000" y="4374000"/>
-            <a:ext cx="2088000" cy="378000"/>
+            <a:off x="11520000" y="3942000"/>
+            <a:ext cx="1170000" cy="792000"/>
           </a:xfrm>
           <a:prstGeom prst="rect">
             <a:avLst/>
@@ -2770,18 +2885,18 @@
       </p:pic>
       <p:sp>
         <p:nvSpPr>
-          <p:cNvPr id="51" name="Shape 39"/>
-          <p:cNvSpPr/>
-          <p:nvPr/>
-        </p:nvSpPr>
-        <p:spPr>
-          <a:xfrm>
-            <a:off x="10566000" y="4374000"/>
-            <a:ext cx="2088000" cy="378000"/>
+          <p:cNvPr id="56" name="Shape 44"/>
+          <p:cNvSpPr/>
+          <p:nvPr/>
+        </p:nvSpPr>
+        <p:spPr>
+          <a:xfrm>
+            <a:off x="11520000" y="3942000"/>
+            <a:ext cx="1170000" cy="792000"/>
           </a:xfrm>
           <a:prstGeom prst="roundRect">
             <a:avLst>
-              <a:gd name="adj" fmla="val 4838"/>
+              <a:gd name="adj" fmla="val 2309"/>
             </a:avLst>
           </a:prstGeom>
           <a:solidFill>
@@ -2799,7 +2914,7 @@
       </p:sp>
       <p:sp>
         <p:nvSpPr>
-          <p:cNvPr id="52" name="Shape 40"/>
+          <p:cNvPr id="57" name="Shape 45"/>
           <p:cNvSpPr/>
           <p:nvPr/>
         </p:nvSpPr>
@@ -2823,7 +2938,7 @@
       </p:sp>
       <p:sp>
         <p:nvSpPr>
-          <p:cNvPr id="53" name="Shape 41"/>
+          <p:cNvPr id="58" name="Shape 46"/>
           <p:cNvSpPr/>
           <p:nvPr/>
         </p:nvSpPr>
@@ -2847,7 +2962,7 @@
       </p:sp>
       <p:sp>
         <p:nvSpPr>
-          <p:cNvPr id="54" name="Shape 42"/>
+          <p:cNvPr id="59" name="Shape 47"/>
           <p:cNvSpPr/>
           <p:nvPr/>
         </p:nvSpPr>
@@ -2871,7 +2986,7 @@
       </p:sp>
       <p:sp>
         <p:nvSpPr>
-          <p:cNvPr id="55" name="Shape 43"/>
+          <p:cNvPr id="60" name="Shape 48"/>
           <p:cNvSpPr/>
           <p:nvPr/>
         </p:nvSpPr>
@@ -2895,7 +3010,7 @@
       </p:sp>
       <p:sp>
         <p:nvSpPr>
-          <p:cNvPr id="56" name="Shape 44"/>
+          <p:cNvPr id="61" name="Shape 49"/>
           <p:cNvSpPr/>
           <p:nvPr/>
         </p:nvSpPr>
@@ -2919,7 +3034,7 @@
       </p:sp>
       <p:sp>
         <p:nvSpPr>
-          <p:cNvPr id="57" name="Shape 45"/>
+          <p:cNvPr id="62" name="Shape 50"/>
           <p:cNvSpPr/>
           <p:nvPr/>
         </p:nvSpPr>
@@ -2946,7 +3061,7 @@
       </p:sp>
       <p:sp>
         <p:nvSpPr>
-          <p:cNvPr id="58" name="Text 46"/>
+          <p:cNvPr id="63" name="Text 51"/>
           <p:cNvSpPr/>
           <p:nvPr/>
         </p:nvSpPr>
@@ -2985,7 +3100,7 @@
       </p:sp>
       <p:sp>
         <p:nvSpPr>
-          <p:cNvPr id="59" name="Shape 47"/>
+          <p:cNvPr id="64" name="Shape 52"/>
           <p:cNvSpPr/>
           <p:nvPr/>
         </p:nvSpPr>
@@ -3012,7 +3127,7 @@
       </p:sp>
       <p:sp>
         <p:nvSpPr>
-          <p:cNvPr id="60" name="Text 48"/>
+          <p:cNvPr id="65" name="Text 53"/>
           <p:cNvSpPr/>
           <p:nvPr/>
         </p:nvSpPr>
@@ -3051,7 +3166,7 @@
       </p:sp>
       <p:sp>
         <p:nvSpPr>
-          <p:cNvPr id="61" name="Shape 49"/>
+          <p:cNvPr id="66" name="Shape 54"/>
           <p:cNvSpPr/>
           <p:nvPr/>
         </p:nvSpPr>
@@ -3078,7 +3193,7 @@
       </p:sp>
       <p:sp>
         <p:nvSpPr>
-          <p:cNvPr id="62" name="Text 50"/>
+          <p:cNvPr id="67" name="Text 55"/>
           <p:cNvSpPr/>
           <p:nvPr/>
         </p:nvSpPr>
@@ -3117,7 +3232,7 @@
       </p:sp>
       <p:sp>
         <p:nvSpPr>
-          <p:cNvPr id="63" name="Shape 51"/>
+          <p:cNvPr id="68" name="Shape 56"/>
           <p:cNvSpPr/>
           <p:nvPr/>
         </p:nvSpPr>
@@ -3144,7 +3259,7 @@
       </p:sp>
       <p:sp>
         <p:nvSpPr>
-          <p:cNvPr id="64" name="Text 52"/>
+          <p:cNvPr id="69" name="Text 57"/>
           <p:cNvSpPr/>
           <p:nvPr/>
         </p:nvSpPr>
@@ -3183,7 +3298,7 @@
       </p:sp>
       <p:sp>
         <p:nvSpPr>
-          <p:cNvPr id="65" name="Shape 53"/>
+          <p:cNvPr id="70" name="Shape 58"/>
           <p:cNvSpPr/>
           <p:nvPr/>
         </p:nvSpPr>
@@ -3210,7 +3325,7 @@
       </p:sp>
       <p:sp>
         <p:nvSpPr>
-          <p:cNvPr id="66" name="Text 54"/>
+          <p:cNvPr id="71" name="Text 59"/>
           <p:cNvSpPr/>
           <p:nvPr/>
         </p:nvSpPr>
@@ -3249,7 +3364,7 @@
       </p:sp>
       <p:sp>
         <p:nvSpPr>
-          <p:cNvPr id="67" name="Shape 55"/>
+          <p:cNvPr id="72" name="Shape 60"/>
           <p:cNvSpPr/>
           <p:nvPr/>
         </p:nvSpPr>
@@ -3276,7 +3391,7 @@
       </p:sp>
       <p:sp>
         <p:nvSpPr>
-          <p:cNvPr id="68" name="Text 56"/>
+          <p:cNvPr id="73" name="Text 61"/>
           <p:cNvSpPr/>
           <p:nvPr/>
         </p:nvSpPr>
